--- a/dist/초6/수학/연산과비례/초6_수학_연산과비례_09_소수의나눗셈3.pptx
+++ b/dist/초6/수학/연산과비례/초6_수학_연산과비례_09_소수의나눗셈3.pptx
@@ -121,13 +121,13 @@
   <p:extLst>
     <p:ext uri="{521415D9-36F7-43E2-AB2F-B90AF26B5E84}">
       <p14:sectionLst xmlns:p14="http://schemas.microsoft.com/office/powerpoint/2010/main">
-        <p14:section name="도입" id="{80c0d50a-5740-16a6-54d1-0127adc3b3b4}">
+        <p14:section name="도입" id="{c44feac3-09d4-9834-28f4-f63bd5ead43a}">
           <p14:sldIdLst>
             <p14:sldId id="256"/>
             <p14:sldId id="257"/>
           </p14:sldIdLst>
         </p14:section>
-        <p14:section name="개념" id="{3580c138-5397-b919-7cab-138604f25690}">
+        <p14:section name="개념" id="{d0793027-82be-b070-6edf-f5afe000b93d}">
           <p14:sldIdLst>
             <p14:sldId id="258"/>
             <p14:sldId id="259"/>
@@ -135,7 +135,7 @@
             <p14:sldId id="263"/>
           </p14:sldIdLst>
         </p14:section>
-        <p14:section name="연습" id="{1a9ea0d9-be3f-8b09-79e5-3609bbfb9dad}">
+        <p14:section name="연습" id="{04778653-f4c2-b3ce-3a57-87fc82235a20}">
           <p14:sldIdLst>
             <p14:sldId id="260"/>
             <p14:sldId id="261"/>
@@ -143,25 +143,25 @@
             <p14:sldId id="265"/>
           </p14:sldIdLst>
         </p14:section>
-        <p14:section name="개념" id="{37966754-f330-f6fe-017e-edb189c6d044}">
+        <p14:section name="개념" id="{b65c952e-63fc-e75f-7cd8-cf02263b5895}">
           <p14:sldIdLst/>
         </p14:section>
-        <p14:section name="연습" id="{39a570b5-1102-3688-1f9f-38b0a0a81efa}">
+        <p14:section name="연습" id="{53d2097e-fc01-4bf8-943f-3ae43c7f469c}">
           <p14:sldIdLst/>
         </p14:section>
-        <p14:section name="확인" id="{1b41032e-99e2-aeeb-1cad-524a67e28982}">
+        <p14:section name="확인" id="{38f25f82-484d-9a4d-6afe-6ce2c24c6533}">
           <p14:sldIdLst>
             <p14:sldId id="266"/>
             <p14:sldId id="267"/>
             <p14:sldId id="268"/>
           </p14:sldIdLst>
         </p14:section>
-        <p14:section name="정리" id="{974732b2-d348-0ed7-6aa3-4cdc9294f6dc}">
+        <p14:section name="정리" id="{ee5b0a76-9b8a-0342-f499-36c9422c9966}">
           <p14:sldIdLst>
             <p14:sldId id="269"/>
           </p14:sldIdLst>
         </p14:section>
-        <p14:section name="보충" id="{291c558e-647d-ce69-fc08-d74199275661}">
+        <p14:section name="보충" id="{6d8a9d4b-5947-a752-606d-6dbd3f98d7e6}">
           <p14:sldIdLst>
             <p14:sldId id="270"/>
           </p14:sldIdLst>
